--- a/presentation/defense.pptx
+++ b/presentation/defense.pptx
@@ -647,7 +647,7 @@
           <a:lstStyle/>
           <a:p>
             <a:r>
-              <a:t>План построен по предоставленному DWG в исходном масштабе. После сравнения вариантов выбраны 32 двухпортовые In06 и четыре распределительные группы. Это один LTE-пул на каждом диапазоне, а не четыре независимые ячейки. Две MIMO-ветви проходят отдельно до двух портов каждой антенны. На каждой ветви гибриды объединяют операторов, триплексеры объединяют диапазоны, а зональные делители распределяют мощность между восемью антеннами. Существующая ВК не найдена: размещение головного узла в части 104.2 является моим проектным допущением. Помещение 89 не локализовано. Его площадь полностью учитывается как непокрытая. Метраж трасс уменьшился примерно на 41 процент относительно начального варианта.</a:t>
+              <a:t>План построен по предоставленному DWG в исходном масштабе. После сравнения вариантов выбраны 32 двухпортовые In06 и четыре распределительные группы. Это один LTE-пул на каждом диапазоне, а не четыре независимые ячейки. Две MIMO-ветви проходят отдельно до двух портов каждой антенны. На каждой ветви гибриды объединяют операторов, триплексеры — диапазоны. В зоне две антенны подключены напрямую к PC252, две через PC250 и четыре через второй PC252. Доли мощности — четверть, восьмая и шестнадцатая. Это перераспределение при сохранении суммарной мощности. Существующая ВК не найдена: размещение головного узла в части 104.2 является моим проектным допущением. Помещение 89 не локализовано. Его площадь полностью учитывается как непокрытая. Исправлена геометрия четырёх спорных групп; неопределённость 114.2 сохранена.</a:t>
             </a:r>
           </a:p>
         </p:txBody>
@@ -717,7 +717,7 @@
           <a:lstStyle/>
           <a:p>
             <a:r>
-              <a:t>Рассчитаны 384 сочетания антенны, диапазона и расстояния, а также карта с шагом 25 сантиметров. В модели учитываются кабели, делители, высота и пересечения стен. Пилот 23 дБм условно нормирован на CRS одного порта; определение мощности в задании неоднозначно. На B7 номинальный результат составляет 95.77 процента от заданных 2100 квадратных метров. Дополнительные три децибела потерь снижают его до 93.65 процента. Худший отдельный путь на 20 метрах даёт -92.69 дБм; площадь оценивается по всем антеннам. Это сценарный прогноз, а не измерения. RSRP не подтверждает SINR, RSRQ или скорость. Для DCS отдельно проверены условные мощности BCCH, но не внешний C/I.</a:t>
+              <a:t>Рассчитаны 384 сочетания антенны, диапазона и расстояния, а также карта с шагом 25 сантиметров. В модели учитываются кабели, делители, высота и пересечения стен. Пилот 23 дБм условно нормирован на CRS одного порта; определение мощности в задании неоднозначно. На B7 номинальный результат составляет 96.55 процента от заданных 2100 квадратных метров. При дополнительных трёх децибелах остаётся 96.32 процента. При закрытых проёмах, исключении спорного контура и ещё трёх децибелах — 96.11 процента. Запас достигнут в модели. Худший отдельный путь на 20 метрах даёт -96.66 дБм; площадь оценивается по всем антеннам. Это сценарный прогноз, а не измерения. RSRP не подтверждает SINR, RSRQ или скорость. Для DCS отдельно проверены условные мощности BCCH, но не внешний C/I.</a:t>
             </a:r>
           </a:p>
         </p:txBody>
@@ -787,7 +787,7 @@
           <a:lstStyle/>
           <a:p>
             <a:r>
-              <a:t>Спецификация формируется из той же структуры, что схемы и трассы. В ней только позиции предоставленного перечня. Учтены 32 антенны, шесть гибридов, восемь триплексеров, девять двухвыходных и шестнадцать четырёхвыходных делителей. Кабель с резервом: 794 метра семь восьмых и 399 метров одна вторая. На итоговой проверке нулевые фидерные связи заменены шестью местными джамперами. Всего 115 джамперов, включая 12 резервных входных. Для свободных портов нужны нагрузки, отсутствующие в перечне; пожарная модификация и исполнения разъёмов также не подтверждены.</a:t>
+              <a:t>Спецификация формируется из той же структуры, что схемы и трассы. В ней только позиции предоставленного перечня. Учтены 32 антенны, шесть гибридов, восемь триплексеров, девять двухвыходных и шестнадцать четырёхвыходных делителей. Кабель с резервом: 1316 метров семь восьмых и 292 метров одна вторая. Метраж фидеров вырос примерно на 35 процентов к предыдущему варианту. Это цена запаса. Всего 113 джамперов, включая 12 резервных входных и 4 местных. Для свободных портов нужны нагрузки, отсутствующие в перечне; пожарная модификация и исполнения разъёмов также не подтверждены.</a:t>
             </a:r>
           </a:p>
         </p:txBody>
@@ -857,7 +857,7 @@
           <a:lstStyle/>
           <a:p>
             <a:r>
-              <a:t>Три главных решения — общий пул с новой моделью спроса, две раздельные MIMO-ветви и совместный выбор расположения узла и дерева распределения. Числа согласованы и воспроизводимы. Номинальная модель проходит RSRP, но запас к неопределённости недостаточен. Полное соответствие заданию не доказано: помеховые показатели неизвестны, пассивная схема не обеспечивает требуемое удалённое регулирование, часть комплектации не подтверждена. Эти ограничения отражены в документах, а не скрыты за проходящим номинальным результатом.</a:t>
+              <a:t>Три главных решения — общий пул с новой моделью спроса, восстановление контуров и неравномерное распределение мощности. Две MIMO-ветви сохранены. Числа согласованы и воспроизводимы. Номинальная модель и запас три децибела проходят; n=3 и другое определение пилота не проходят. Полное соответствие заданию не доказано: помеховые показатели неизвестны, пассивная схема не обеспечивает требуемое удалённое регулирование, часть комплектации не подтверждена. Эти ограничения отражены в документах, а не скрыты за проходящим номинальным результатом.</a:t>
             </a:r>
           </a:p>
         </p:txBody>
@@ -5277,7 +5277,7 @@
           <a:p>
             <a:pPr>
               <a:lnSpc>
-                <a:spcPts val="2529"/>
+                <a:spcPts val="2300"/>
               </a:lnSpc>
               <a:spcBef>
                 <a:spcPts val="0"/>
@@ -5285,7 +5285,7 @@
               <a:spcAft>
                 <a:spcPts val="0"/>
               </a:spcAft>
-              <a:defRPr sz="2200" b="0">
+              <a:defRPr sz="2000" b="0">
                 <a:solidFill>
                   <a:srgbClr val="17324D"/>
                 </a:solidFill>
@@ -5293,9 +5293,76 @@
               </a:defRPr>
             </a:pPr>
             <a:r>
-              <a:t>PC221 → PC211 → PC250 → PC252</a:t>
-            </a:r>
-          </a:p>
+              <a:t>PC221 → PC211 → PC252</a:t>
+            </a:r>
+          </a:p>
+          <a:p>
+            <a:pPr>
+              <a:lnSpc>
+                <a:spcPts val="2300"/>
+              </a:lnSpc>
+              <a:spcBef>
+                <a:spcPts val="0"/>
+              </a:spcBef>
+              <a:spcAft>
+                <a:spcPts val="0"/>
+              </a:spcAft>
+              <a:defRPr sz="2000" b="0">
+                <a:solidFill>
+                  <a:srgbClr val="17324D"/>
+                </a:solidFill>
+                <a:latin typeface="DejaVu Sans"/>
+              </a:defRPr>
+            </a:pPr>
+            <a:r>
+              <a:t>В зоне: 2 напрямую + 2 через PC250 + 4 через</a:t>
+            </a:r>
+          </a:p>
+          <a:p>
+            <a:pPr>
+              <a:lnSpc>
+                <a:spcPts val="2300"/>
+              </a:lnSpc>
+              <a:spcBef>
+                <a:spcPts val="0"/>
+              </a:spcBef>
+              <a:spcAft>
+                <a:spcPts val="0"/>
+              </a:spcAft>
+              <a:defRPr sz="2000" b="0">
+                <a:solidFill>
+                  <a:srgbClr val="17324D"/>
+                </a:solidFill>
+                <a:latin typeface="DejaVu Sans"/>
+              </a:defRPr>
+            </a:pPr>
+            <a:r>
+              <a:t>PC252</a:t>
+            </a:r>
+          </a:p>
+        </p:txBody>
+      </p:sp>
+      <p:sp>
+        <p:nvSpPr>
+          <p:cNvPr id="10" name="TextBox 9"/>
+          <p:cNvSpPr txBox="1"/>
+          <p:nvPr/>
+        </p:nvSpPr>
+        <p:spPr>
+          <a:xfrm>
+            <a:off x="4663440" y="3977639"/>
+            <a:ext cx="6903720" cy="914400"/>
+          </a:xfrm>
+          <a:prstGeom prst="rect">
+            <a:avLst/>
+          </a:prstGeom>
+          <a:noFill/>
+        </p:spPr>
+        <p:txBody>
+          <a:bodyPr wrap="none" lIns="0" rIns="0" tIns="0" bIns="0">
+            <a:noAutofit/>
+          </a:bodyPr>
+          <a:lstStyle/>
           <a:p>
             <a:pPr>
               <a:lnSpc>
@@ -5315,51 +5382,6 @@
               </a:defRPr>
             </a:pPr>
             <a:r>
-              <a:t>Отдельно для M1 и M2, до портов P1/P2</a:t>
-            </a:r>
-          </a:p>
-        </p:txBody>
-      </p:sp>
-      <p:sp>
-        <p:nvSpPr>
-          <p:cNvPr id="10" name="TextBox 9"/>
-          <p:cNvSpPr txBox="1"/>
-          <p:nvPr/>
-        </p:nvSpPr>
-        <p:spPr>
-          <a:xfrm>
-            <a:off x="4663440" y="3977639"/>
-            <a:ext cx="6903720" cy="914400"/>
-          </a:xfrm>
-          <a:prstGeom prst="rect">
-            <a:avLst/>
-          </a:prstGeom>
-          <a:noFill/>
-        </p:spPr>
-        <p:txBody>
-          <a:bodyPr wrap="none" lIns="0" rIns="0" tIns="0" bIns="0">
-            <a:noAutofit/>
-          </a:bodyPr>
-          <a:lstStyle/>
-          <a:p>
-            <a:pPr>
-              <a:lnSpc>
-                <a:spcPts val="2529"/>
-              </a:lnSpc>
-              <a:spcBef>
-                <a:spcPts val="0"/>
-              </a:spcBef>
-              <a:spcAft>
-                <a:spcPts val="0"/>
-              </a:spcAft>
-              <a:defRPr sz="2200" b="0">
-                <a:solidFill>
-                  <a:srgbClr val="17324D"/>
-                </a:solidFill>
-                <a:latin typeface="DejaVu Sans"/>
-              </a:defRPr>
-            </a:pPr>
-            <a:r>
               <a:t>ВК в части 104.2 — проектное допущение</a:t>
             </a:r>
           </a:p>
@@ -5427,7 +5449,7 @@
               </a:defRPr>
             </a:pPr>
             <a:r>
-              <a:t>Фидеры: 1084 м; −41,4% к исходному варианту.</a:t>
+              <a:t>Фидеры: 1461 м; +34.8% к прежней схеме.</a:t>
             </a:r>
           </a:p>
         </p:txBody>
@@ -5576,7 +5598,7 @@
               </a:defRPr>
             </a:pPr>
             <a:r>
-              <a:t>RSRP: номинал проходит, запас к потерям недостаточен</a:t>
+              <a:t>RSRP: запас 3 дБ проверен в модели P1</a:t>
             </a:r>
           </a:p>
         </p:txBody>
@@ -5735,7 +5757,7 @@
               </a:defRPr>
             </a:pPr>
             <a:r>
-              <a:t>B7: 95.77% от 2100 м²</a:t>
+              <a:t>B7: 96.55% от 2100 м²</a:t>
             </a:r>
           </a:p>
         </p:txBody>
@@ -5774,13 +5796,13 @@
               </a:spcAft>
               <a:defRPr sz="2600" b="1">
                 <a:solidFill>
-                  <a:srgbClr val="B22C35"/>
+                  <a:srgbClr val="227958"/>
                 </a:solidFill>
                 <a:latin typeface="DejaVu Sans"/>
               </a:defRPr>
             </a:pPr>
             <a:r>
-              <a:t>+3 дБ RF-потерь → 93.65%</a:t>
+              <a:t>+3 дБ RF-потерь → 96.32%</a:t>
             </a:r>
           </a:p>
         </p:txBody>
@@ -5825,7 +5847,7 @@
               </a:defRPr>
             </a:pPr>
             <a:r>
-              <a:t>384 RF-точки; 35007 ячеек карты</a:t>
+              <a:t>Проёмы / спорный контур / +3 дБ: 96.11%</a:t>
             </a:r>
           </a:p>
           <a:p>
@@ -5847,7 +5869,7 @@
               </a:defRPr>
             </a:pPr>
             <a:r>
-              <a:t>Стены 15 дБ; колонны / фасад 30 дБ</a:t>
+              <a:t>36 сценариев; 35522 ячейки карты</a:t>
             </a:r>
           </a:p>
         </p:txBody>
@@ -6265,7 +6287,7 @@
               </a:defRPr>
             </a:pPr>
             <a:r>
-              <a:t>Закупочный метраж: 7/8 — 794 м; 1/2 — 399 м</a:t>
+              <a:t>Закупочный метраж: 7/8 — 1316 м; 1/2 — 292 м</a:t>
             </a:r>
           </a:p>
         </p:txBody>
@@ -6310,7 +6332,7 @@
               </a:defRPr>
             </a:pPr>
             <a:r>
-              <a:t>115 джамперов: 12 резервных; 6 местных</a:t>
+              <a:t>113 джамперов: 12 резервных; 4 местных</a:t>
             </a:r>
           </a:p>
           <a:p>
@@ -6332,7 +6354,7 @@
               </a:defRPr>
             </a:pPr>
             <a:r>
-              <a:t>Разъёмы: 1/2 — 112; 7/8 — 52</a:t>
+              <a:t>Разъёмы: 1/2 — 84; 7/8 — 84</a:t>
             </a:r>
           </a:p>
         </p:txBody>
@@ -6705,7 +6727,7 @@
               </a:defRPr>
             </a:pPr>
             <a:r>
-              <a:t>2. Раздельные MIMO-тракты</a:t>
+              <a:t>2. Проверка контуров по архитектуре</a:t>
             </a:r>
           </a:p>
           <a:p>
@@ -6727,7 +6749,7 @@
               </a:defRPr>
             </a:pPr>
             <a:r>
-              <a:t>3. Совместный выбор ВК и дерева распределения</a:t>
+              <a:t>3. Неравномерное деление мощности; две MIMO-ветви</a:t>
             </a:r>
           </a:p>
         </p:txBody>
@@ -6815,7 +6837,7 @@
               </a:defRPr>
             </a:pPr>
             <a:r>
-              <a:t>Номинальный RSRP проходит; неблагоприятные сценарии — нет.</a:t>
+              <a:t>P1 и запас 3 дБ проходят; n=3 и нормировка P2 — нет.</a:t>
             </a:r>
           </a:p>
           <a:p>

--- a/presentation/defense.pptx
+++ b/presentation/defense.pptx
@@ -717,7 +717,7 @@
           <a:lstStyle/>
           <a:p>
             <a:r>
-              <a:t>Рассчитаны 384 сочетания антенны, диапазона и расстояния, а также карта с шагом 25 сантиметров. В модели учитываются кабели, делители, высота и пересечения стен. Пилот 23 дБм условно нормирован на CRS одного порта; определение мощности в задании неоднозначно. На B7 номинальный результат составляет 96.55 процента от заданных 2100 квадратных метров. При дополнительных трёх децибелах остаётся 96.32 процента. При закрытых проёмах, исключении спорного контура и ещё трёх децибелах — 96.11 процента. Запас достигнут в модели. Худший отдельный путь на 20 метрах даёт -96.66 дБм; площадь оценивается по всем антеннам. Это сценарный прогноз, а не измерения. RSRP не подтверждает SINR, RSRQ или скорость. Для DCS отдельно проверены условные мощности BCCH, но не внешний C/I.</a:t>
+              <a:t>Рассчитаны 384 сочетания антенны, диапазона и расстояния, а также карта с шагом 25 сантиметров. В модели учитываются кабели, делители, высота и пересечения стен. Пилот 23 дБм условно нормирован на CRS одного порта; определение мощности в задании неоднозначно. На B7 номинальный результат составляет 96.58 процента от заданных 2100 квадратных метров. При показателе затухания n=3 — 96.37 процента. При дополнительных трёх децибелах остаётся 96.51 процента. При закрытых проёмах, исключении спорного контура и ещё трёх децибелах — 96.32 процента. Запас достигнут в модели. Худший отдельный путь на 20 метрах даёт -95.64 дБм; площадь оценивается по всем антеннам. Это сценарный прогноз, а не измерения. RSRP не подтверждает SINR, RSRQ или скорость. Для DCS отдельно проверены условные мощности BCCH, но не внешний C/I.</a:t>
             </a:r>
           </a:p>
         </p:txBody>
@@ -787,7 +787,7 @@
           <a:lstStyle/>
           <a:p>
             <a:r>
-              <a:t>Спецификация формируется из той же структуры, что схемы и трассы. В ней только позиции предоставленного перечня. Учтены 32 антенны, шесть гибридов, восемь триплексеров, девять двухвыходных и шестнадцать четырёхвыходных делителей. Кабель с резервом: 1316 метров семь восьмых и 292 метров одна вторая. Метраж фидеров вырос примерно на 35 процентов к предыдущему варианту. Это цена запаса. Всего 113 джамперов, включая 12 резервных входных и 4 местных. Для свободных портов нужны нагрузки, отсутствующие в перечне; пожарная модификация и исполнения разъёмов также не подтверждены.</a:t>
+              <a:t>Спецификация формируется из той же структуры, что схемы и трассы. В ней только позиции предоставленного перечня. Учтены 32 антенны, шесть гибридов, восемь триплексеров, девять двухвыходных и шестнадцать четырёхвыходных делителей. Кабель с резервом: 1366 метров семь восьмых и 179 метров одна вторая. По сравнению с предыдущим вариантом метраж коаксиала сокращён примерно на 4 процента. Всего 113 джамперов, включая 12 резервных входных и 4 местных. Для свободных портов нужны нагрузки, отсутствующие в перечне; пожарная модификация и исполнения разъёмов также не подтверждены.</a:t>
             </a:r>
           </a:p>
         </p:txBody>
@@ -857,7 +857,7 @@
           <a:lstStyle/>
           <a:p>
             <a:r>
-              <a:t>Три главных решения — общий пул с новой моделью спроса, восстановление контуров и неравномерное распределение мощности. Две MIMO-ветви сохранены. Числа согласованы и воспроизводимы. Номинальная модель и запас три децибела проходят; n=3 и другое определение пилота не проходят. Полное соответствие заданию не доказано: помеховые показатели неизвестны, пассивная схема не обеспечивает требуемое удалённое регулирование, часть комплектации не подтверждена. Эти ограничения отражены в документах, а не скрыты за проходящим номинальным результатом.</a:t>
+              <a:t>Три главных решения — общий пул с новой моделью спроса, восстановление контуров и неравномерное распределение мощности. Две MIMO-ветви сохранены. Числа согласованы и воспроизводимы. Номинальная модель, n=3 и запас три децибела проходят; другое определение пилота P2 не проходит. Полное соответствие заданию не доказано: помеховые показатели неизвестны, пассивная схема не обеспечивает требуемое удалённое регулирование, часть комплектации не подтверждена. Эти ограничения отражены в документах, а не скрыты за проходящим номинальным результатом.</a:t>
             </a:r>
           </a:p>
         </p:txBody>
@@ -5449,7 +5449,7 @@
               </a:defRPr>
             </a:pPr>
             <a:r>
-              <a:t>Фидеры: 1461 м; +34.8% к прежней схеме.</a:t>
+              <a:t>Коаксиал: 1404 м; -3.9% к предыдущей схеме.</a:t>
             </a:r>
           </a:p>
         </p:txBody>
@@ -5598,7 +5598,7 @@
               </a:defRPr>
             </a:pPr>
             <a:r>
-              <a:t>RSRP: запас 3 дБ проверен в модели P1</a:t>
+              <a:t>RSRP: n=3 и запас 3 дБ проверены в модели P1</a:t>
             </a:r>
           </a:p>
         </p:txBody>
@@ -5695,7 +5695,7 @@
       </p:sp>
       <p:pic>
         <p:nvPicPr>
-          <p:cNvPr id="7" name="Picture 6" descr="rsrp-2600-walls.png"/>
+          <p:cNvPr id="7" name="Picture 6" descr="rsrp-2600-n3.png"/>
           <p:cNvPicPr>
             <a:picLocks noChangeAspect="1"/>
           </p:cNvPicPr>
@@ -5757,7 +5757,7 @@
               </a:defRPr>
             </a:pPr>
             <a:r>
-              <a:t>B7: 96.55% от 2100 м²</a:t>
+              <a:t>B7 при n=3: 96.37%</a:t>
             </a:r>
           </a:p>
         </p:txBody>
@@ -5802,7 +5802,7 @@
               </a:defRPr>
             </a:pPr>
             <a:r>
-              <a:t>+3 дБ RF-потерь → 96.32%</a:t>
+              <a:t>+3 дБ RF-потерь → 96.51%</a:t>
             </a:r>
           </a:p>
         </p:txBody>
@@ -5847,7 +5847,7 @@
               </a:defRPr>
             </a:pPr>
             <a:r>
-              <a:t>Проёмы / спорный контур / +3 дБ: 96.11%</a:t>
+              <a:t>Проёмы / спорный контур / +3 дБ: 96.32%</a:t>
             </a:r>
           </a:p>
           <a:p>
@@ -5869,7 +5869,7 @@
               </a:defRPr>
             </a:pPr>
             <a:r>
-              <a:t>36 сценариев; 35522 ячейки карты</a:t>
+              <a:t>39 сценариев; 35522 ячейки карты</a:t>
             </a:r>
           </a:p>
         </p:txBody>
@@ -6287,7 +6287,7 @@
               </a:defRPr>
             </a:pPr>
             <a:r>
-              <a:t>Закупочный метраж: 7/8 — 1316 м; 1/2 — 292 м</a:t>
+              <a:t>Закупочный метраж: 7/8 — 1366 м; 1/2 — 179 м</a:t>
             </a:r>
           </a:p>
         </p:txBody>
@@ -6354,7 +6354,7 @@
               </a:defRPr>
             </a:pPr>
             <a:r>
-              <a:t>Разъёмы: 1/2 — 84; 7/8 — 84</a:t>
+              <a:t>Разъёмы: 1/2 — 68; 7/8 — 100</a:t>
             </a:r>
           </a:p>
         </p:txBody>
@@ -6837,7 +6837,7 @@
               </a:defRPr>
             </a:pPr>
             <a:r>
-              <a:t>P1 и запас 3 дБ проходят; n=3 и нормировка P2 — нет.</a:t>
+              <a:t>P1, n=3 и запас 3 дБ проходят; нормировка P2 — нет.</a:t>
             </a:r>
           </a:p>
           <a:p>

--- a/presentation/defense.pptx
+++ b/presentation/defense.pptx
@@ -507,7 +507,23 @@
           <a:lstStyle/>
           <a:p>
             <a:r>
-              <a:t>Меня зовут Павел Абалаков. Учусь в УрТИСИ по направлению «Инфокоммуникационные технологии и системы связи». В профиле указаны второе место на хакатоне связи 2025 года и проект Payment OCR. Моя текущая роль: [УКАЗАТЬ РОЛЬ]. Личный вклад в проект: [УКАЗАТЬ ВКЛАД]. Профессиональные интересы: [УКАЗАТЬ ИНТЕРЕСЫ].</a:t>
+              <a:t>Меня зовут Павел Абалаков. Я студент третьего курса УрТИСИ, изучаю инфокоммуникационные технологии и системы связи. В командах Payment OCR и Magistral Dispatcher MAX выступал как product manager: распределял задачи и выстраивал коммуникацию. В Payment OCR также отвечал за архитектуру. Развиваюсь в product management и управлении проектами.</a:t>
+            </a:r>
+          </a:p>
+          <a:p/>
+          <a:p>
+            <a:r>
+              <a:t>Проекты:</a:t>
+            </a:r>
+          </a:p>
+          <a:p>
+            <a:r>
+              <a:t>Svyaz Hack Payment OCR: https://github.com/abalakovpa/svyaz-hack-payment-ocr</a:t>
+            </a:r>
+          </a:p>
+          <a:p>
+            <a:r>
+              <a:t>Magistral Dispatcher MAX: https://github.com/EEGRINO/magistral-dispatcher-max</a:t>
             </a:r>
           </a:p>
         </p:txBody>
@@ -647,7 +663,7 @@
           <a:lstStyle/>
           <a:p>
             <a:r>
-              <a:t>План построен по предоставленному DWG в исходном масштабе. После сравнения вариантов выбраны 32 двухпортовые In06 и четыре распределительные группы. Это один LTE-пул на каждом диапазоне, а не четыре независимые ячейки. Две MIMO-ветви проходят отдельно до двух портов каждой антенны. На каждой ветви гибриды объединяют операторов, триплексеры — диапазоны. В зоне две антенны подключены напрямую к PC252, две через PC250 и четыре через второй PC252. Доли мощности — четверть, восьмая и шестнадцатая. Это перераспределение при сохранении суммарной мощности. Существующая ВК не найдена: размещение головного узла в части 104.2 является моим проектным допущением. Помещение 89 не локализовано. Его площадь полностью учитывается как непокрытая. Исправлена геометрия четырёх спорных групп; неопределённость 114.2 сохранена.</a:t>
+              <a:t>План построен по предоставленному DWG в исходном масштабе. Выбраны 32 двухпортовые In06 и четыре распределительные группы; их покрытие проверено расчётом. Это один LTE-пул на каждом диапазоне, а не четыре независимые ячейки. Две MIMO-ветви проходят отдельно до двух портов каждой антенны. На каждой ветви гибриды объединяют операторов, триплексеры — диапазоны. В зоне две антенны подключены напрямую к PC252, две через PC250 и четыре через второй PC252. Доли мощности — четверть, восьмая и шестнадцатая. Это перераспределение при сохранении суммарной мощности. Существующая ВК не найдена: размещение головного узла в части 104.2 является моим проектным допущением. Помещение 89 не локализовано. Его площадь полностью учитывается как непокрытая. Исправлена геометрия четырёх спорных групп; неопределённость 114.2 сохранена.</a:t>
             </a:r>
           </a:p>
         </p:txBody>
@@ -717,7 +733,7 @@
           <a:lstStyle/>
           <a:p>
             <a:r>
-              <a:t>Рассчитаны 384 сочетания антенны, диапазона и расстояния, а также карта с шагом 25 сантиметров. В модели учитываются кабели, делители, высота и пересечения стен. Пилот 23 дБм условно нормирован на CRS одного порта; определение мощности в задании неоднозначно. На B7 номинальный результат составляет 96.58 процента от заданных 2100 квадратных метров. При показателе затухания n=3 — 96.37 процента. При дополнительных трёх децибелах остаётся 96.51 процента. При закрытых проёмах, исключении спорного контура и ещё трёх децибелах — 96.32 процента. Запас достигнут в модели. Худший отдельный путь на 20 метрах даёт -95.64 дБм; площадь оценивается по всем антеннам. Это сценарный прогноз, а не измерения. RSRP не подтверждает SINR, RSRQ или скорость. Для DCS отдельно проверены условные мощности BCCH, но не внешний C/I.</a:t>
+              <a:t>Рассчитаны 384 сочетания антенны, диапазона и расстояния, а также карта с шагом 25 сантиметров. В модели учитываются кабели, делители, высота и пересечения стен. Пилот 23 дБм условно нормирован на CRS одного порта; определение мощности в задании неоднозначно. На B7 номинальный результат составляет 96.58 процента от заданных 2100 квадратных метров. При показателе затухания n=3 — 96.37 процента. В отдельной проверке дополнительных трёх децибел остаётся 96.51 процента. При закрытых проёмах, исключении спорного контура и ещё трёх децибелах — 96.32 процента. Запас достигнут в модели. Худший отдельный путь на 20 метрах даёт -95.64 дБм; площадь оценивается по всем антеннам. Это сценарный прогноз, а не измерения. RSRP не подтверждает SINR, RSRQ или скорость. Для DCS отдельно проверены условные мощности BCCH, но не внешний C/I.</a:t>
             </a:r>
           </a:p>
         </p:txBody>
@@ -787,7 +803,7 @@
           <a:lstStyle/>
           <a:p>
             <a:r>
-              <a:t>Спецификация формируется из той же структуры, что схемы и трассы. В ней только позиции предоставленного перечня. Учтены 32 антенны, шесть гибридов, восемь триплексеров, девять двухвыходных и шестнадцать четырёхвыходных делителей. Кабель с резервом: 1366 метров семь восьмых и 179 метров одна вторая. По сравнению с предыдущим вариантом метраж коаксиала сокращён примерно на 4 процента. Всего 113 джамперов, включая 12 резервных входных и 4 местных. Для свободных портов нужны нагрузки, отсутствующие в перечне; пожарная модификация и исполнения разъёмов также не подтверждены.</a:t>
+              <a:t>Спецификация формируется из той же структуры, что схемы и трассы. В ней только позиции предоставленного перечня. Учтены 32 антенны, шесть гибридов, восемь триплексеров, девять двухвыходных и шестнадцать четырёхвыходных делителей. Кабель с резервом: 1366 метров семь восьмых и 179 метров одна вторая. Установленный метраж коаксиала двух ветвей составляет 1404 метра. Всего 113 джамперов, включая 12 резервных входных и 4 местных. Для свободных портов нужны нагрузки, отсутствующие в перечне; пожарная модификация и исполнения разъёмов также не подтверждены.</a:t>
             </a:r>
           </a:p>
         </p:txBody>
@@ -857,7 +873,7 @@
           <a:lstStyle/>
           <a:p>
             <a:r>
-              <a:t>Три главных решения — общий пул с новой моделью спроса, восстановление контуров и неравномерное распределение мощности. Две MIMO-ветви сохранены. Числа согласованы и воспроизводимы. Номинальная модель, n=3 и запас три децибела проходят; другое определение пилота P2 не проходит. Полное соответствие заданию не доказано: помеховые показатели неизвестны, пассивная схема не обеспечивает требуемое удалённое регулирование, часть комплектации не подтверждена. Эти ограничения отражены в документах, а не скрыты за проходящим номинальным результатом.</a:t>
+              <a:t>Три главных решения — общий пул с новой моделью спроса, восстановление контуров и неравномерное распределение мощности. Две MIMO-ветви сохранены. Числа согласованы и воспроизводимы. Номинальная модель и отдельные проверки n=3 и запаса три децибела проходят; другое определение пилота P2 не проходит. Полное соответствие заданию не доказано: помеховые показатели неизвестны, пассивная схема не обеспечивает требуемое удалённое регулирование, часть комплектации не подтверждена. Эти ограничения отражены в документах, а не скрыты за проходящим номинальным результатом.</a:t>
             </a:r>
           </a:p>
         </p:txBody>
@@ -4124,7 +4140,7 @@
               </a:defRPr>
             </a:pPr>
             <a:r>
-              <a:t>УрТИСИ · 11.03.02 · Инфокоммуникационные технологии и</a:t>
+              <a:t>УрТИСИ · III курс · 11.03.02 · Инфокоммуникационные</a:t>
             </a:r>
           </a:p>
           <a:p>
@@ -4146,7 +4162,7 @@
               </a:defRPr>
             </a:pPr>
             <a:r>
-              <a:t>системы связи</a:t>
+              <a:t>технологии и системы связи</a:t>
             </a:r>
           </a:p>
         </p:txBody>
@@ -4191,7 +4207,7 @@
               </a:defRPr>
             </a:pPr>
             <a:r>
-              <a:t>III курс по профилю GitHub; II место — хакатон связи, 2025</a:t>
+              <a:t>II место — хакатон связи, 2025</a:t>
             </a:r>
           </a:p>
         </p:txBody>
@@ -4204,7 +4220,7 @@
         </p:nvSpPr>
         <p:spPr>
           <a:xfrm>
-            <a:off x="594360" y="3474720"/>
+            <a:off x="594360" y="3383280"/>
             <a:ext cx="10789920" cy="640080"/>
           </a:xfrm>
           <a:prstGeom prst="rect">
@@ -4220,7 +4236,7 @@
           <a:p>
             <a:pPr>
               <a:lnSpc>
-                <a:spcPts val="2760"/>
+                <a:spcPts val="2645"/>
               </a:lnSpc>
               <a:spcBef>
                 <a:spcPts val="0"/>
@@ -4228,7 +4244,7 @@
               <a:spcAft>
                 <a:spcPts val="0"/>
               </a:spcAft>
-              <a:defRPr sz="2400" b="0">
+              <a:defRPr sz="2300" b="0">
                 <a:solidFill>
                   <a:srgbClr val="17324D"/>
                 </a:solidFill>
@@ -4236,7 +4252,7 @@
               </a:defRPr>
             </a:pPr>
             <a:r>
-              <a:t>Проект: Svyaz Hack Payment OCR</a:t>
+              <a:t>Проекты: Payment OCR · Magistral Dispatcher MAX</a:t>
             </a:r>
           </a:p>
         </p:txBody>
@@ -4249,14 +4265,14 @@
         </p:nvSpPr>
         <p:spPr>
           <a:xfrm>
-            <a:off x="548640" y="4389120"/>
-            <a:ext cx="11064240" cy="1645920"/>
+            <a:off x="548640" y="4206240"/>
+            <a:ext cx="11064240" cy="1920240"/>
           </a:xfrm>
           <a:prstGeom prst="rect">
             <a:avLst/>
           </a:prstGeom>
           <a:solidFill>
-            <a:srgbClr val="FFF0D8"/>
+            <a:srgbClr val="EAF2F8"/>
           </a:solidFill>
           <a:ln>
             <a:noFill/>
@@ -4292,8 +4308,8 @@
         </p:nvSpPr>
         <p:spPr>
           <a:xfrm>
-            <a:off x="777240" y="4572000"/>
-            <a:ext cx="10515600" cy="1280160"/>
+            <a:off x="777240" y="4389120"/>
+            <a:ext cx="10515600" cy="1554480"/>
           </a:xfrm>
           <a:prstGeom prst="rect">
             <a:avLst/>
@@ -4308,7 +4324,7 @@
           <a:p>
             <a:pPr>
               <a:lnSpc>
-                <a:spcPts val="2185"/>
+                <a:spcPts val="2070"/>
               </a:lnSpc>
               <a:spcBef>
                 <a:spcPts val="0"/>
@@ -4316,7 +4332,7 @@
               <a:spcAft>
                 <a:spcPts val="0"/>
               </a:spcAft>
-              <a:defRPr sz="1900" b="0">
+              <a:defRPr sz="1800" b="0">
                 <a:solidFill>
                   <a:srgbClr val="17324D"/>
                 </a:solidFill>
@@ -4324,13 +4340,13 @@
               </a:defRPr>
             </a:pPr>
             <a:r>
-              <a:t>Роль: [заполнить]</a:t>
+              <a:t>Роль: Студент; product manager в проектных командах</a:t>
             </a:r>
           </a:p>
           <a:p>
             <a:pPr>
               <a:lnSpc>
-                <a:spcPts val="2185"/>
+                <a:spcPts val="2070"/>
               </a:lnSpc>
               <a:spcBef>
                 <a:spcPts val="0"/>
@@ -4338,7 +4354,7 @@
               <a:spcAft>
                 <a:spcPts val="0"/>
               </a:spcAft>
-              <a:defRPr sz="1900" b="0">
+              <a:defRPr sz="1800" b="0">
                 <a:solidFill>
                   <a:srgbClr val="17324D"/>
                 </a:solidFill>
@@ -4346,13 +4362,13 @@
               </a:defRPr>
             </a:pPr>
             <a:r>
-              <a:t>Вклад: [заполнить]</a:t>
+              <a:t>Вклад: Payment OCR: архитектура; оба проекта: задачи и командная коммуникация</a:t>
             </a:r>
           </a:p>
           <a:p>
             <a:pPr>
               <a:lnSpc>
-                <a:spcPts val="2185"/>
+                <a:spcPts val="2070"/>
               </a:lnSpc>
               <a:spcBef>
                 <a:spcPts val="0"/>
@@ -4360,7 +4376,7 @@
               <a:spcAft>
                 <a:spcPts val="0"/>
               </a:spcAft>
-              <a:defRPr sz="1900" b="0">
+              <a:defRPr sz="1800" b="0">
                 <a:solidFill>
                   <a:srgbClr val="17324D"/>
                 </a:solidFill>
@@ -4368,7 +4384,7 @@
               </a:defRPr>
             </a:pPr>
             <a:r>
-              <a:t>Интересы: [заполнить]</a:t>
+              <a:t>Интересы: Product management, управление проектами и командная коммуникация</a:t>
             </a:r>
           </a:p>
         </p:txBody>
@@ -5449,7 +5465,7 @@
               </a:defRPr>
             </a:pPr>
             <a:r>
-              <a:t>Коаксиал: 1404 м; -3.9% к предыдущей схеме.</a:t>
+              <a:t>Коаксиал двух ветвей: 1404 м.</a:t>
             </a:r>
           </a:p>
         </p:txBody>
@@ -6837,7 +6853,7 @@
               </a:defRPr>
             </a:pPr>
             <a:r>
-              <a:t>P1, n=3 и запас 3 дБ проходят; нормировка P2 — нет.</a:t>
+              <a:t>P1: n=3 и +3 дБ проходят в отдельных проверках.</a:t>
             </a:r>
           </a:p>
           <a:p>
@@ -6859,7 +6875,7 @@
               </a:defRPr>
             </a:pPr>
             <a:r>
-              <a:t>RSRQ / SINR / C/I / UL не подтверждены.</a:t>
+              <a:t>P2, RSRQ / SINR / C/I / UL остаются ограничениями.</a:t>
             </a:r>
           </a:p>
           <a:p>
